--- a/VietnamecSimulator.pptx
+++ b/VietnamecSimulator.pptx
@@ -268,7 +268,7 @@
           <a:p>
             <a:fld id="{BA5FE871-04E0-5340-A77A-88A0D6B20BA6}" type="datetimeFigureOut">
               <a:rPr lang="en-CZ" smtClean="0"/>
-              <a:t>17.01.2025</a:t>
+              <a:t>12.06.2025</a:t>
             </a:fld>
             <a:endParaRPr lang="en-CZ"/>
           </a:p>
@@ -468,7 +468,7 @@
           <a:p>
             <a:fld id="{BA5FE871-04E0-5340-A77A-88A0D6B20BA6}" type="datetimeFigureOut">
               <a:rPr lang="en-CZ" smtClean="0"/>
-              <a:t>17.01.2025</a:t>
+              <a:t>12.06.2025</a:t>
             </a:fld>
             <a:endParaRPr lang="en-CZ"/>
           </a:p>
@@ -678,7 +678,7 @@
           <a:p>
             <a:fld id="{BA5FE871-04E0-5340-A77A-88A0D6B20BA6}" type="datetimeFigureOut">
               <a:rPr lang="en-CZ" smtClean="0"/>
-              <a:t>17.01.2025</a:t>
+              <a:t>12.06.2025</a:t>
             </a:fld>
             <a:endParaRPr lang="en-CZ"/>
           </a:p>
@@ -878,7 +878,7 @@
           <a:p>
             <a:fld id="{BA5FE871-04E0-5340-A77A-88A0D6B20BA6}" type="datetimeFigureOut">
               <a:rPr lang="en-CZ" smtClean="0"/>
-              <a:t>17.01.2025</a:t>
+              <a:t>12.06.2025</a:t>
             </a:fld>
             <a:endParaRPr lang="en-CZ"/>
           </a:p>
@@ -1154,7 +1154,7 @@
           <a:p>
             <a:fld id="{BA5FE871-04E0-5340-A77A-88A0D6B20BA6}" type="datetimeFigureOut">
               <a:rPr lang="en-CZ" smtClean="0"/>
-              <a:t>17.01.2025</a:t>
+              <a:t>12.06.2025</a:t>
             </a:fld>
             <a:endParaRPr lang="en-CZ"/>
           </a:p>
@@ -1422,7 +1422,7 @@
           <a:p>
             <a:fld id="{BA5FE871-04E0-5340-A77A-88A0D6B20BA6}" type="datetimeFigureOut">
               <a:rPr lang="en-CZ" smtClean="0"/>
-              <a:t>17.01.2025</a:t>
+              <a:t>12.06.2025</a:t>
             </a:fld>
             <a:endParaRPr lang="en-CZ"/>
           </a:p>
@@ -1837,7 +1837,7 @@
           <a:p>
             <a:fld id="{BA5FE871-04E0-5340-A77A-88A0D6B20BA6}" type="datetimeFigureOut">
               <a:rPr lang="en-CZ" smtClean="0"/>
-              <a:t>17.01.2025</a:t>
+              <a:t>12.06.2025</a:t>
             </a:fld>
             <a:endParaRPr lang="en-CZ"/>
           </a:p>
@@ -1979,7 +1979,7 @@
           <a:p>
             <a:fld id="{BA5FE871-04E0-5340-A77A-88A0D6B20BA6}" type="datetimeFigureOut">
               <a:rPr lang="en-CZ" smtClean="0"/>
-              <a:t>17.01.2025</a:t>
+              <a:t>12.06.2025</a:t>
             </a:fld>
             <a:endParaRPr lang="en-CZ"/>
           </a:p>
@@ -2092,7 +2092,7 @@
           <a:p>
             <a:fld id="{BA5FE871-04E0-5340-A77A-88A0D6B20BA6}" type="datetimeFigureOut">
               <a:rPr lang="en-CZ" smtClean="0"/>
-              <a:t>17.01.2025</a:t>
+              <a:t>12.06.2025</a:t>
             </a:fld>
             <a:endParaRPr lang="en-CZ"/>
           </a:p>
@@ -2405,7 +2405,7 @@
           <a:p>
             <a:fld id="{BA5FE871-04E0-5340-A77A-88A0D6B20BA6}" type="datetimeFigureOut">
               <a:rPr lang="en-CZ" smtClean="0"/>
-              <a:t>17.01.2025</a:t>
+              <a:t>12.06.2025</a:t>
             </a:fld>
             <a:endParaRPr lang="en-CZ"/>
           </a:p>
@@ -2694,7 +2694,7 @@
           <a:p>
             <a:fld id="{BA5FE871-04E0-5340-A77A-88A0D6B20BA6}" type="datetimeFigureOut">
               <a:rPr lang="en-CZ" smtClean="0"/>
-              <a:t>17.01.2025</a:t>
+              <a:t>12.06.2025</a:t>
             </a:fld>
             <a:endParaRPr lang="en-CZ"/>
           </a:p>
@@ -2937,7 +2937,7 @@
           <a:p>
             <a:fld id="{BA5FE871-04E0-5340-A77A-88A0D6B20BA6}" type="datetimeFigureOut">
               <a:rPr lang="en-CZ" smtClean="0"/>
-              <a:t>17.01.2025</a:t>
+              <a:t>12.06.2025</a:t>
             </a:fld>
             <a:endParaRPr lang="en-CZ"/>
           </a:p>
@@ -5914,7 +5914,7 @@
           <a:lstStyle/>
           <a:p>
             <a:r>
-              <a:rPr lang="en-CZ" sz="3600"/>
+              <a:rPr lang="en-CZ" sz="3600" dirty="0"/>
               <a:t>Technologie</a:t>
             </a:r>
           </a:p>
@@ -5968,10 +5968,10 @@
       </p:pic>
       <p:pic>
         <p:nvPicPr>
-          <p:cNvPr id="1034" name="Picture 10" descr="Polycam - LiDAR &amp; 3D Scanner for iPhone &amp; Android">
-            <a:extLst>
-              <a:ext uri="{FF2B5EF4-FFF2-40B4-BE49-F238E27FC236}">
-                <a16:creationId xmlns:a16="http://schemas.microsoft.com/office/drawing/2014/main" id="{A26F7BA2-2C85-7613-D361-24736172D811}"/>
+          <p:cNvPr id="1032" name="Picture 8" descr="An orange and blue symbol with a blue circle&#10;&#10;Description automatically generated">
+            <a:extLst>
+              <a:ext uri="{FF2B5EF4-FFF2-40B4-BE49-F238E27FC236}">
+                <a16:creationId xmlns:a16="http://schemas.microsoft.com/office/drawing/2014/main" id="{D4D709A9-E9B5-6B94-333F-26AC85C976F3}"/>
               </a:ext>
             </a:extLst>
           </p:cNvPr>
@@ -5994,8 +5994,8 @@
         </p:blipFill>
         <p:spPr bwMode="auto">
           <a:xfrm>
-            <a:off x="4978855" y="375320"/>
-            <a:ext cx="2483314" cy="1657612"/>
+            <a:off x="5206683" y="375320"/>
+            <a:ext cx="2027659" cy="1657612"/>
           </a:xfrm>
           <a:prstGeom prst="rect">
             <a:avLst/>
@@ -6014,10 +6014,10 @@
       </p:pic>
       <p:pic>
         <p:nvPicPr>
-          <p:cNvPr id="1032" name="Picture 8" descr="An orange and blue symbol with a blue circle&#10;&#10;Description automatically generated">
-            <a:extLst>
-              <a:ext uri="{FF2B5EF4-FFF2-40B4-BE49-F238E27FC236}">
-                <a16:creationId xmlns:a16="http://schemas.microsoft.com/office/drawing/2014/main" id="{D4D709A9-E9B5-6B94-333F-26AC85C976F3}"/>
+          <p:cNvPr id="4" name="Picture 2" descr="Mixamo - YouTube">
+            <a:extLst>
+              <a:ext uri="{FF2B5EF4-FFF2-40B4-BE49-F238E27FC236}">
+                <a16:creationId xmlns:a16="http://schemas.microsoft.com/office/drawing/2014/main" id="{6DF5AA07-1E35-A995-31B7-A2A68592C726}"/>
               </a:ext>
             </a:extLst>
           </p:cNvPr>
@@ -6040,8 +6040,8 @@
         </p:blipFill>
         <p:spPr bwMode="auto">
           <a:xfrm>
-            <a:off x="5116265" y="2424609"/>
-            <a:ext cx="2201060" cy="1799367"/>
+            <a:off x="5317111" y="2424609"/>
+            <a:ext cx="1799367" cy="1799367"/>
           </a:xfrm>
           <a:prstGeom prst="rect">
             <a:avLst/>
@@ -6225,55 +6225,55 @@
           <a:lstStyle/>
           <a:p>
             <a:r>
-              <a:rPr lang="en-CZ" sz="2000"/>
+              <a:rPr lang="en-CZ" sz="2000" dirty="0"/>
               <a:t>Unity </a:t>
             </a:r>
           </a:p>
           <a:p>
             <a:r>
-              <a:rPr lang="en-CZ" sz="2000"/>
+              <a:rPr lang="en-CZ" sz="2000" dirty="0"/>
               <a:t>JetBrains Rider</a:t>
             </a:r>
           </a:p>
           <a:p>
             <a:r>
-              <a:rPr lang="en-CZ" sz="2000"/>
+              <a:rPr lang="en-CZ" sz="2000" dirty="0"/>
               <a:t>C#</a:t>
             </a:r>
           </a:p>
           <a:p>
             <a:r>
-              <a:rPr lang="en-GB" sz="2000"/>
+              <a:rPr lang="en-GB" sz="2000" dirty="0"/>
               <a:t>B</a:t>
             </a:r>
             <a:r>
-              <a:rPr lang="en-CZ" sz="2000"/>
+              <a:rPr lang="en-CZ" sz="2000" dirty="0"/>
               <a:t>lender</a:t>
             </a:r>
           </a:p>
           <a:p>
             <a:r>
-              <a:rPr lang="en-CZ" sz="2000"/>
+              <a:rPr lang="en-CZ" sz="2000" dirty="0"/>
               <a:t>ChatGPT</a:t>
             </a:r>
           </a:p>
           <a:p>
             <a:r>
-              <a:rPr lang="en-CZ" sz="2000"/>
-              <a:t>Polycam</a:t>
-            </a:r>
-          </a:p>
-          <a:p>
-            <a:endParaRPr lang="en-CZ" sz="2000"/>
-          </a:p>
-          <a:p>
-            <a:endParaRPr lang="en-CZ" sz="2000"/>
+              <a:rPr lang="en-CZ" sz="2000" dirty="0"/>
+              <a:t>Mixamo</a:t>
+            </a:r>
+          </a:p>
+          <a:p>
+            <a:endParaRPr lang="en-CZ" sz="2000" dirty="0"/>
+          </a:p>
+          <a:p>
+            <a:endParaRPr lang="en-CZ" sz="2000" dirty="0"/>
           </a:p>
         </p:txBody>
       </p:sp>
       <p:cxnSp>
         <p:nvCxnSpPr>
-          <p:cNvPr id="1050" name="Straight Connector 1049">
+          <p:cNvPr id="1061" name="Straight Connector 1060">
             <a:extLst>
               <a:ext uri="{FF2B5EF4-FFF2-40B4-BE49-F238E27FC236}">
                 <a16:creationId xmlns:a16="http://schemas.microsoft.com/office/drawing/2014/main" id="{822A5670-0F7B-4199-AEAB-33FBA9CEA44D}"/>
@@ -6328,7 +6328,7 @@
       </p:cxnSp>
       <p:cxnSp>
         <p:nvCxnSpPr>
-          <p:cNvPr id="1052" name="Straight Connector 1051">
+          <p:cNvPr id="1063" name="Straight Connector 1062">
             <a:extLst>
               <a:ext uri="{FF2B5EF4-FFF2-40B4-BE49-F238E27FC236}">
                 <a16:creationId xmlns:a16="http://schemas.microsoft.com/office/drawing/2014/main" id="{8BB1744D-A7DF-4B65-B6E3-DCF12BB2D869}"/>
@@ -6383,7 +6383,7 @@
       </p:cxnSp>
       <p:cxnSp>
         <p:nvCxnSpPr>
-          <p:cNvPr id="1054" name="Straight Connector 1053">
+          <p:cNvPr id="1065" name="Straight Connector 1064">
             <a:extLst>
               <a:ext uri="{FF2B5EF4-FFF2-40B4-BE49-F238E27FC236}">
                 <a16:creationId xmlns:a16="http://schemas.microsoft.com/office/drawing/2014/main" id="{882DD753-EA38-4E86-91FB-05041A44A28E}"/>
@@ -6438,7 +6438,7 @@
       </p:cxnSp>
       <p:cxnSp>
         <p:nvCxnSpPr>
-          <p:cNvPr id="1056" name="Straight Connector 1055">
+          <p:cNvPr id="1067" name="Straight Connector 1066">
             <a:extLst>
               <a:ext uri="{FF2B5EF4-FFF2-40B4-BE49-F238E27FC236}">
                 <a16:creationId xmlns:a16="http://schemas.microsoft.com/office/drawing/2014/main" id="{6DA63E78-7704-45EF-B5D3-EADDF5D82674}"/>
@@ -6579,12 +6579,228 @@
           </a:p>
         </p:txBody>
       </p:sp>
+      <p:grpSp>
+        <p:nvGrpSpPr>
+          <p:cNvPr id="8" name="Group 7">
+            <a:extLst>
+              <a:ext uri="{FF2B5EF4-FFF2-40B4-BE49-F238E27FC236}">
+                <a16:creationId xmlns:a16="http://schemas.microsoft.com/office/drawing/2014/main" id="{C86487B0-CE57-F36E-9941-68DEC02DCA9D}"/>
+              </a:ext>
+            </a:extLst>
+          </p:cNvPr>
+          <p:cNvGrpSpPr/>
+          <p:nvPr/>
+        </p:nvGrpSpPr>
+        <p:grpSpPr>
+          <a:xfrm>
+            <a:off x="523792" y="1460827"/>
+            <a:ext cx="5168766" cy="4245907"/>
+            <a:chOff x="838200" y="2036560"/>
+            <a:chExt cx="5168766" cy="4245907"/>
+          </a:xfrm>
+        </p:grpSpPr>
+        <p:pic>
+          <p:nvPicPr>
+            <p:cNvPr id="1026" name="Picture 2" descr="Photo">
+              <a:extLst>
+                <a:ext uri="{FF2B5EF4-FFF2-40B4-BE49-F238E27FC236}">
+                  <a16:creationId xmlns:a16="http://schemas.microsoft.com/office/drawing/2014/main" id="{92608CDC-6AAC-4882-2B6D-0C63140E9CE5}"/>
+                </a:ext>
+              </a:extLst>
+            </p:cNvPr>
+            <p:cNvPicPr>
+              <a:picLocks noChangeAspect="1" noChangeArrowheads="1"/>
+            </p:cNvPicPr>
+            <p:nvPr/>
+          </p:nvPicPr>
+          <p:blipFill>
+            <a:blip r:embed="rId2">
+              <a:extLst>
+                <a:ext uri="{28A0092B-C50C-407E-A947-70E740481C1C}">
+                  <a14:useLocalDpi xmlns:a14="http://schemas.microsoft.com/office/drawing/2010/main" val="0"/>
+                </a:ext>
+              </a:extLst>
+            </a:blip>
+            <a:srcRect/>
+            <a:stretch>
+              <a:fillRect/>
+            </a:stretch>
+          </p:blipFill>
+          <p:spPr bwMode="auto">
+            <a:xfrm>
+              <a:off x="838200" y="2036560"/>
+              <a:ext cx="5168766" cy="3876575"/>
+            </a:xfrm>
+            <a:prstGeom prst="rect">
+              <a:avLst/>
+            </a:prstGeom>
+            <a:ln w="38100" cap="sq">
+              <a:solidFill>
+                <a:srgbClr val="000000"/>
+              </a:solidFill>
+              <a:prstDash val="solid"/>
+              <a:miter lim="800000"/>
+            </a:ln>
+            <a:effectLst>
+              <a:outerShdw blurRad="50800" dist="38100" dir="2700000" algn="tl" rotWithShape="0">
+                <a:srgbClr val="000000">
+                  <a:alpha val="43000"/>
+                </a:srgbClr>
+              </a:outerShdw>
+            </a:effectLst>
+            <a:extLst>
+              <a:ext uri="{909E8E84-426E-40DD-AFC4-6F175D3DCCD1}">
+                <a14:hiddenFill xmlns:a14="http://schemas.microsoft.com/office/drawing/2010/main">
+                  <a:solidFill>
+                    <a:srgbClr val="FFFFFF"/>
+                  </a:solidFill>
+                </a14:hiddenFill>
+              </a:ext>
+            </a:extLst>
+          </p:spPr>
+        </p:pic>
+        <p:sp>
+          <p:nvSpPr>
+            <p:cNvPr id="4" name="TextovéPole 3">
+              <a:extLst>
+                <a:ext uri="{FF2B5EF4-FFF2-40B4-BE49-F238E27FC236}">
+                  <a16:creationId xmlns:a16="http://schemas.microsoft.com/office/drawing/2014/main" id="{C72A75EF-5E5C-F43B-75F1-0E078AC9BC9C}"/>
+                </a:ext>
+              </a:extLst>
+            </p:cNvPr>
+            <p:cNvSpPr txBox="1"/>
+            <p:nvPr/>
+          </p:nvSpPr>
+          <p:spPr>
+            <a:xfrm>
+              <a:off x="2727159" y="5913135"/>
+              <a:ext cx="1026694" cy="369332"/>
+            </a:xfrm>
+            <a:prstGeom prst="rect">
+              <a:avLst/>
+            </a:prstGeom>
+            <a:noFill/>
+          </p:spPr>
+          <p:txBody>
+            <a:bodyPr wrap="square" rtlCol="0">
+              <a:spAutoFit/>
+            </a:bodyPr>
+            <a:lstStyle/>
+            <a:p>
+              <a:r>
+                <a:rPr lang="cs-CZ" dirty="0"/>
+                <a:t>Inspirace </a:t>
+              </a:r>
+            </a:p>
+          </p:txBody>
+        </p:sp>
+      </p:grpSp>
+      <p:grpSp>
+        <p:nvGrpSpPr>
+          <p:cNvPr id="5" name="Group 4">
+            <a:extLst>
+              <a:ext uri="{FF2B5EF4-FFF2-40B4-BE49-F238E27FC236}">
+                <a16:creationId xmlns:a16="http://schemas.microsoft.com/office/drawing/2014/main" id="{B40410C1-E020-D9E1-C48D-01C2ABF8C50A}"/>
+              </a:ext>
+            </a:extLst>
+          </p:cNvPr>
+          <p:cNvGrpSpPr/>
+          <p:nvPr/>
+        </p:nvGrpSpPr>
+        <p:grpSpPr>
+          <a:xfrm>
+            <a:off x="6006966" y="1649445"/>
+            <a:ext cx="5292809" cy="3499337"/>
+            <a:chOff x="6380910" y="2059623"/>
+            <a:chExt cx="5292809" cy="3499337"/>
+          </a:xfrm>
+        </p:grpSpPr>
+        <p:pic>
+          <p:nvPicPr>
+            <p:cNvPr id="6" name="Obrázek 5">
+              <a:extLst>
+                <a:ext uri="{FF2B5EF4-FFF2-40B4-BE49-F238E27FC236}">
+                  <a16:creationId xmlns:a16="http://schemas.microsoft.com/office/drawing/2014/main" id="{A779CA1A-A1F4-8132-F480-6C063DD89E79}"/>
+                </a:ext>
+              </a:extLst>
+            </p:cNvPr>
+            <p:cNvPicPr>
+              <a:picLocks noChangeAspect="1"/>
+            </p:cNvPicPr>
+            <p:nvPr/>
+          </p:nvPicPr>
+          <p:blipFill>
+            <a:blip r:embed="rId3"/>
+            <a:stretch>
+              <a:fillRect/>
+            </a:stretch>
+          </p:blipFill>
+          <p:spPr>
+            <a:xfrm>
+              <a:off x="6380910" y="2059623"/>
+              <a:ext cx="5292809" cy="2995068"/>
+            </a:xfrm>
+            <a:prstGeom prst="rect">
+              <a:avLst/>
+            </a:prstGeom>
+            <a:ln w="38100" cap="sq">
+              <a:solidFill>
+                <a:srgbClr val="000000"/>
+              </a:solidFill>
+              <a:prstDash val="solid"/>
+              <a:miter lim="800000"/>
+            </a:ln>
+            <a:effectLst>
+              <a:outerShdw blurRad="50800" dist="38100" dir="2700000" algn="tl" rotWithShape="0">
+                <a:srgbClr val="000000">
+                  <a:alpha val="43000"/>
+                </a:srgbClr>
+              </a:outerShdw>
+            </a:effectLst>
+          </p:spPr>
+        </p:pic>
+        <p:sp>
+          <p:nvSpPr>
+            <p:cNvPr id="7" name="TextovéPole 6">
+              <a:extLst>
+                <a:ext uri="{FF2B5EF4-FFF2-40B4-BE49-F238E27FC236}">
+                  <a16:creationId xmlns:a16="http://schemas.microsoft.com/office/drawing/2014/main" id="{C895C9B8-6B9F-7027-3789-6014A6F7EBBB}"/>
+                </a:ext>
+              </a:extLst>
+            </p:cNvPr>
+            <p:cNvSpPr txBox="1"/>
+            <p:nvPr/>
+          </p:nvSpPr>
+          <p:spPr>
+            <a:xfrm>
+              <a:off x="8110086" y="5189628"/>
+              <a:ext cx="3243714" cy="369332"/>
+            </a:xfrm>
+            <a:prstGeom prst="rect">
+              <a:avLst/>
+            </a:prstGeom>
+            <a:noFill/>
+          </p:spPr>
+          <p:txBody>
+            <a:bodyPr wrap="square" rtlCol="0">
+              <a:spAutoFit/>
+            </a:bodyPr>
+            <a:lstStyle/>
+            <a:p>
+              <a:r>
+                <a:rPr lang="cs-CZ" dirty="0"/>
+                <a:t>Nedokončený model </a:t>
+              </a:r>
+            </a:p>
+          </p:txBody>
+        </p:sp>
+      </p:grpSp>
       <p:pic>
         <p:nvPicPr>
-          <p:cNvPr id="1026" name="Picture 2" descr="Photo">
-            <a:extLst>
-              <a:ext uri="{FF2B5EF4-FFF2-40B4-BE49-F238E27FC236}">
-                <a16:creationId xmlns:a16="http://schemas.microsoft.com/office/drawing/2014/main" id="{92608CDC-6AAC-4882-2B6D-0C63140E9CE5}"/>
+          <p:cNvPr id="2050" name="Picture 2">
+            <a:extLst>
+              <a:ext uri="{FF2B5EF4-FFF2-40B4-BE49-F238E27FC236}">
+                <a16:creationId xmlns:a16="http://schemas.microsoft.com/office/drawing/2014/main" id="{DBC5261D-2BD3-4E73-E07A-3437DD5F0F71}"/>
               </a:ext>
             </a:extLst>
           </p:cNvPr>
@@ -6594,7 +6810,7 @@
           <p:nvPr/>
         </p:nvPicPr>
         <p:blipFill>
-          <a:blip r:embed="rId2">
+          <a:blip r:embed="rId4">
             <a:extLst>
               <a:ext uri="{28A0092B-C50C-407E-A947-70E740481C1C}">
                 <a14:useLocalDpi xmlns:a14="http://schemas.microsoft.com/office/drawing/2010/main" val="0"/>
@@ -6608,8 +6824,8 @@
         </p:blipFill>
         <p:spPr bwMode="auto">
           <a:xfrm>
-            <a:off x="838200" y="2036560"/>
-            <a:ext cx="5168766" cy="3876575"/>
+            <a:off x="338853" y="171667"/>
+            <a:ext cx="11514293" cy="6514666"/>
           </a:xfrm>
           <a:prstGeom prst="rect">
             <a:avLst/>
@@ -6639,120 +6855,6 @@
           </a:extLst>
         </p:spPr>
       </p:pic>
-      <p:sp>
-        <p:nvSpPr>
-          <p:cNvPr id="4" name="TextovéPole 3">
-            <a:extLst>
-              <a:ext uri="{FF2B5EF4-FFF2-40B4-BE49-F238E27FC236}">
-                <a16:creationId xmlns:a16="http://schemas.microsoft.com/office/drawing/2014/main" id="{C72A75EF-5E5C-F43B-75F1-0E078AC9BC9C}"/>
-              </a:ext>
-            </a:extLst>
-          </p:cNvPr>
-          <p:cNvSpPr txBox="1"/>
-          <p:nvPr/>
-        </p:nvSpPr>
-        <p:spPr>
-          <a:xfrm>
-            <a:off x="2727159" y="5913135"/>
-            <a:ext cx="1026694" cy="369332"/>
-          </a:xfrm>
-          <a:prstGeom prst="rect">
-            <a:avLst/>
-          </a:prstGeom>
-          <a:noFill/>
-        </p:spPr>
-        <p:txBody>
-          <a:bodyPr wrap="square" rtlCol="0">
-            <a:spAutoFit/>
-          </a:bodyPr>
-          <a:lstStyle/>
-          <a:p>
-            <a:r>
-              <a:rPr lang="cs-CZ" dirty="0"/>
-              <a:t>Inspirace </a:t>
-            </a:r>
-          </a:p>
-        </p:txBody>
-      </p:sp>
-      <p:pic>
-        <p:nvPicPr>
-          <p:cNvPr id="6" name="Obrázek 5">
-            <a:extLst>
-              <a:ext uri="{FF2B5EF4-FFF2-40B4-BE49-F238E27FC236}">
-                <a16:creationId xmlns:a16="http://schemas.microsoft.com/office/drawing/2014/main" id="{A779CA1A-A1F4-8132-F480-6C063DD89E79}"/>
-              </a:ext>
-            </a:extLst>
-          </p:cNvPr>
-          <p:cNvPicPr>
-            <a:picLocks noChangeAspect="1"/>
-          </p:cNvPicPr>
-          <p:nvPr/>
-        </p:nvPicPr>
-        <p:blipFill>
-          <a:blip r:embed="rId3"/>
-          <a:stretch>
-            <a:fillRect/>
-          </a:stretch>
-        </p:blipFill>
-        <p:spPr>
-          <a:xfrm>
-            <a:off x="6426630" y="2194560"/>
-            <a:ext cx="5292809" cy="2995068"/>
-          </a:xfrm>
-          <a:prstGeom prst="rect">
-            <a:avLst/>
-          </a:prstGeom>
-          <a:ln w="38100" cap="sq">
-            <a:solidFill>
-              <a:srgbClr val="000000"/>
-            </a:solidFill>
-            <a:prstDash val="solid"/>
-            <a:miter lim="800000"/>
-          </a:ln>
-          <a:effectLst>
-            <a:outerShdw blurRad="50800" dist="38100" dir="2700000" algn="tl" rotWithShape="0">
-              <a:srgbClr val="000000">
-                <a:alpha val="43000"/>
-              </a:srgbClr>
-            </a:outerShdw>
-          </a:effectLst>
-        </p:spPr>
-      </p:pic>
-      <p:sp>
-        <p:nvSpPr>
-          <p:cNvPr id="7" name="TextovéPole 6">
-            <a:extLst>
-              <a:ext uri="{FF2B5EF4-FFF2-40B4-BE49-F238E27FC236}">
-                <a16:creationId xmlns:a16="http://schemas.microsoft.com/office/drawing/2014/main" id="{C895C9B8-6B9F-7027-3789-6014A6F7EBBB}"/>
-              </a:ext>
-            </a:extLst>
-          </p:cNvPr>
-          <p:cNvSpPr txBox="1"/>
-          <p:nvPr/>
-        </p:nvSpPr>
-        <p:spPr>
-          <a:xfrm>
-            <a:off x="8110086" y="5189628"/>
-            <a:ext cx="3243714" cy="369332"/>
-          </a:xfrm>
-          <a:prstGeom prst="rect">
-            <a:avLst/>
-          </a:prstGeom>
-          <a:noFill/>
-        </p:spPr>
-        <p:txBody>
-          <a:bodyPr wrap="square" rtlCol="0">
-            <a:spAutoFit/>
-          </a:bodyPr>
-          <a:lstStyle/>
-          <a:p>
-            <a:r>
-              <a:rPr lang="cs-CZ" dirty="0"/>
-              <a:t>Nedokončený model </a:t>
-            </a:r>
-          </a:p>
-        </p:txBody>
-      </p:sp>
     </p:spTree>
     <p:extLst>
       <p:ext uri="{BB962C8B-B14F-4D97-AF65-F5344CB8AC3E}">
@@ -6763,6 +6865,158 @@
   <p:clrMapOvr>
     <a:masterClrMapping/>
   </p:clrMapOvr>
+  <p:timing>
+    <p:tnLst>
+      <p:par>
+        <p:cTn id="1" dur="indefinite" restart="never" nodeType="tmRoot">
+          <p:childTnLst>
+            <p:seq concurrent="1" nextAc="seek">
+              <p:cTn id="2" dur="indefinite" nodeType="mainSeq">
+                <p:childTnLst>
+                  <p:par>
+                    <p:cTn id="3" fill="hold">
+                      <p:stCondLst>
+                        <p:cond delay="indefinite"/>
+                      </p:stCondLst>
+                      <p:childTnLst>
+                        <p:par>
+                          <p:cTn id="4" fill="hold">
+                            <p:stCondLst>
+                              <p:cond delay="0"/>
+                            </p:stCondLst>
+                            <p:childTnLst>
+                              <p:par>
+                                <p:cTn id="5" presetID="35" presetClass="entr" presetSubtype="0" fill="hold" nodeType="clickEffect">
+                                  <p:stCondLst>
+                                    <p:cond delay="0"/>
+                                  </p:stCondLst>
+                                  <p:childTnLst>
+                                    <p:set>
+                                      <p:cBhvr>
+                                        <p:cTn id="6" dur="1" fill="hold">
+                                          <p:stCondLst>
+                                            <p:cond delay="0"/>
+                                          </p:stCondLst>
+                                        </p:cTn>
+                                        <p:tgtEl>
+                                          <p:spTgt spid="2050"/>
+                                        </p:tgtEl>
+                                        <p:attrNameLst>
+                                          <p:attrName>style.visibility</p:attrName>
+                                        </p:attrNameLst>
+                                      </p:cBhvr>
+                                      <p:to>
+                                        <p:strVal val="visible"/>
+                                      </p:to>
+                                    </p:set>
+                                    <p:animEffect transition="in" filter="fade">
+                                      <p:cBhvr>
+                                        <p:cTn id="7" dur="2000"/>
+                                        <p:tgtEl>
+                                          <p:spTgt spid="2050"/>
+                                        </p:tgtEl>
+                                      </p:cBhvr>
+                                    </p:animEffect>
+                                    <p:anim calcmode="lin" valueType="num">
+                                      <p:cBhvr>
+                                        <p:cTn id="8" dur="2000" fill="hold"/>
+                                        <p:tgtEl>
+                                          <p:spTgt spid="2050"/>
+                                        </p:tgtEl>
+                                        <p:attrNameLst>
+                                          <p:attrName>style.rotation</p:attrName>
+                                        </p:attrNameLst>
+                                      </p:cBhvr>
+                                      <p:tavLst>
+                                        <p:tav tm="0">
+                                          <p:val>
+                                            <p:fltVal val="720"/>
+                                          </p:val>
+                                        </p:tav>
+                                        <p:tav tm="100000">
+                                          <p:val>
+                                            <p:fltVal val="0"/>
+                                          </p:val>
+                                        </p:tav>
+                                      </p:tavLst>
+                                    </p:anim>
+                                    <p:anim calcmode="lin" valueType="num">
+                                      <p:cBhvr>
+                                        <p:cTn id="9" dur="2000" fill="hold"/>
+                                        <p:tgtEl>
+                                          <p:spTgt spid="2050"/>
+                                        </p:tgtEl>
+                                        <p:attrNameLst>
+                                          <p:attrName>ppt_h</p:attrName>
+                                        </p:attrNameLst>
+                                      </p:cBhvr>
+                                      <p:tavLst>
+                                        <p:tav tm="0">
+                                          <p:val>
+                                            <p:fltVal val="0"/>
+                                          </p:val>
+                                        </p:tav>
+                                        <p:tav tm="100000">
+                                          <p:val>
+                                            <p:strVal val="#ppt_h"/>
+                                          </p:val>
+                                        </p:tav>
+                                      </p:tavLst>
+                                    </p:anim>
+                                    <p:anim calcmode="lin" valueType="num">
+                                      <p:cBhvr>
+                                        <p:cTn id="10" dur="2000" fill="hold"/>
+                                        <p:tgtEl>
+                                          <p:spTgt spid="2050"/>
+                                        </p:tgtEl>
+                                        <p:attrNameLst>
+                                          <p:attrName>ppt_w</p:attrName>
+                                        </p:attrNameLst>
+                                      </p:cBhvr>
+                                      <p:tavLst>
+                                        <p:tav tm="0">
+                                          <p:val>
+                                            <p:fltVal val="0"/>
+                                          </p:val>
+                                        </p:tav>
+                                        <p:tav tm="100000">
+                                          <p:val>
+                                            <p:strVal val="#ppt_w"/>
+                                          </p:val>
+                                        </p:tav>
+                                      </p:tavLst>
+                                    </p:anim>
+                                  </p:childTnLst>
+                                </p:cTn>
+                              </p:par>
+                            </p:childTnLst>
+                          </p:cTn>
+                        </p:par>
+                      </p:childTnLst>
+                    </p:cTn>
+                  </p:par>
+                </p:childTnLst>
+              </p:cTn>
+              <p:prevCondLst>
+                <p:cond evt="onPrev" delay="0">
+                  <p:tgtEl>
+                    <p:sldTgt/>
+                  </p:tgtEl>
+                </p:cond>
+              </p:prevCondLst>
+              <p:nextCondLst>
+                <p:cond evt="onNext" delay="0">
+                  <p:tgtEl>
+                    <p:sldTgt/>
+                  </p:tgtEl>
+                </p:cond>
+              </p:nextCondLst>
+            </p:seq>
+          </p:childTnLst>
+        </p:cTn>
+      </p:par>
+    </p:tnLst>
+  </p:timing>
 </p:sld>
 </file>
 
@@ -7596,8 +7850,8 @@
         </p:nvSpPr>
         <p:spPr>
           <a:xfrm>
-            <a:off x="1285241" y="1008993"/>
-            <a:ext cx="9231410" cy="3542045"/>
+            <a:off x="1294766" y="1070645"/>
+            <a:ext cx="9231410" cy="4387180"/>
           </a:xfrm>
         </p:spPr>
         <p:txBody>
@@ -7606,6 +7860,7 @@
           </a:bodyPr>
           <a:lstStyle/>
           <a:p>
+            <a:pPr algn="ctr"/>
             <a:r>
               <a:rPr lang="en-US" sz="11500" kern="1200" dirty="0" err="1">
                 <a:solidFill>
@@ -7626,62 +7881,7 @@
                 <a:ea typeface="+mj-ea"/>
                 <a:cs typeface="+mj-cs"/>
               </a:rPr>
-              <a:t> </a:t>
-            </a:r>
-            <a:r>
-              <a:rPr lang="en-US" sz="11500" kern="1200" dirty="0" err="1">
-                <a:solidFill>
-                  <a:schemeClr val="tx1"/>
-                </a:solidFill>
-                <a:latin typeface="+mj-lt"/>
-                <a:ea typeface="+mj-ea"/>
-                <a:cs typeface="+mj-cs"/>
-              </a:rPr>
-              <a:t>moc</a:t>
-            </a:r>
-            <a:r>
-              <a:rPr lang="en-US" sz="11500" kern="1200" dirty="0">
-                <a:solidFill>
-                  <a:schemeClr val="tx1"/>
-                </a:solidFill>
-                <a:latin typeface="+mj-lt"/>
-                <a:ea typeface="+mj-ea"/>
-                <a:cs typeface="+mj-cs"/>
-              </a:rPr>
               <a:t> za </a:t>
-            </a:r>
-            <a:r>
-              <a:rPr lang="en-US" sz="11500" kern="1200" dirty="0" err="1">
-                <a:solidFill>
-                  <a:schemeClr val="tx1"/>
-                </a:solidFill>
-                <a:latin typeface="+mj-lt"/>
-                <a:ea typeface="+mj-ea"/>
-                <a:cs typeface="+mj-cs"/>
-              </a:rPr>
-              <a:t>vaš</a:t>
-            </a:r>
-            <a:r>
-              <a:rPr lang="cs-CZ" sz="11500" kern="1200">
-                <a:solidFill>
-                  <a:schemeClr val="tx1"/>
-                </a:solidFill>
-                <a:latin typeface="+mj-lt"/>
-                <a:ea typeface="+mj-ea"/>
-                <a:cs typeface="+mj-cs"/>
-              </a:rPr>
-              <a:t>i</a:t>
-            </a:r>
-            <a:r>
-              <a:rPr lang="en-US" sz="11500" kern="1200">
-                <a:solidFill>
-                  <a:schemeClr val="tx1"/>
-                </a:solidFill>
-                <a:latin typeface="+mj-lt"/>
-                <a:ea typeface="+mj-ea"/>
-                <a:cs typeface="+mj-cs"/>
-              </a:rPr>
-              <a:t> </a:t>
             </a:r>
             <a:r>
               <a:rPr lang="en-US" sz="11500" kern="1200" dirty="0" err="1">

--- a/VietnamecSimulator.pptx
+++ b/VietnamecSimulator.pptx
@@ -268,7 +268,7 @@
           <a:p>
             <a:fld id="{BA5FE871-04E0-5340-A77A-88A0D6B20BA6}" type="datetimeFigureOut">
               <a:rPr lang="en-CZ" smtClean="0"/>
-              <a:t>12.06.2025</a:t>
+              <a:t>08/25/2025</a:t>
             </a:fld>
             <a:endParaRPr lang="en-CZ"/>
           </a:p>
@@ -468,7 +468,7 @@
           <a:p>
             <a:fld id="{BA5FE871-04E0-5340-A77A-88A0D6B20BA6}" type="datetimeFigureOut">
               <a:rPr lang="en-CZ" smtClean="0"/>
-              <a:t>12.06.2025</a:t>
+              <a:t>08/25/2025</a:t>
             </a:fld>
             <a:endParaRPr lang="en-CZ"/>
           </a:p>
@@ -678,7 +678,7 @@
           <a:p>
             <a:fld id="{BA5FE871-04E0-5340-A77A-88A0D6B20BA6}" type="datetimeFigureOut">
               <a:rPr lang="en-CZ" smtClean="0"/>
-              <a:t>12.06.2025</a:t>
+              <a:t>08/25/2025</a:t>
             </a:fld>
             <a:endParaRPr lang="en-CZ"/>
           </a:p>
@@ -878,7 +878,7 @@
           <a:p>
             <a:fld id="{BA5FE871-04E0-5340-A77A-88A0D6B20BA6}" type="datetimeFigureOut">
               <a:rPr lang="en-CZ" smtClean="0"/>
-              <a:t>12.06.2025</a:t>
+              <a:t>08/25/2025</a:t>
             </a:fld>
             <a:endParaRPr lang="en-CZ"/>
           </a:p>
@@ -1154,7 +1154,7 @@
           <a:p>
             <a:fld id="{BA5FE871-04E0-5340-A77A-88A0D6B20BA6}" type="datetimeFigureOut">
               <a:rPr lang="en-CZ" smtClean="0"/>
-              <a:t>12.06.2025</a:t>
+              <a:t>08/25/2025</a:t>
             </a:fld>
             <a:endParaRPr lang="en-CZ"/>
           </a:p>
@@ -1422,7 +1422,7 @@
           <a:p>
             <a:fld id="{BA5FE871-04E0-5340-A77A-88A0D6B20BA6}" type="datetimeFigureOut">
               <a:rPr lang="en-CZ" smtClean="0"/>
-              <a:t>12.06.2025</a:t>
+              <a:t>08/25/2025</a:t>
             </a:fld>
             <a:endParaRPr lang="en-CZ"/>
           </a:p>
@@ -1837,7 +1837,7 @@
           <a:p>
             <a:fld id="{BA5FE871-04E0-5340-A77A-88A0D6B20BA6}" type="datetimeFigureOut">
               <a:rPr lang="en-CZ" smtClean="0"/>
-              <a:t>12.06.2025</a:t>
+              <a:t>08/25/2025</a:t>
             </a:fld>
             <a:endParaRPr lang="en-CZ"/>
           </a:p>
@@ -1979,7 +1979,7 @@
           <a:p>
             <a:fld id="{BA5FE871-04E0-5340-A77A-88A0D6B20BA6}" type="datetimeFigureOut">
               <a:rPr lang="en-CZ" smtClean="0"/>
-              <a:t>12.06.2025</a:t>
+              <a:t>08/25/2025</a:t>
             </a:fld>
             <a:endParaRPr lang="en-CZ"/>
           </a:p>
@@ -2092,7 +2092,7 @@
           <a:p>
             <a:fld id="{BA5FE871-04E0-5340-A77A-88A0D6B20BA6}" type="datetimeFigureOut">
               <a:rPr lang="en-CZ" smtClean="0"/>
-              <a:t>12.06.2025</a:t>
+              <a:t>08/25/2025</a:t>
             </a:fld>
             <a:endParaRPr lang="en-CZ"/>
           </a:p>
@@ -2405,7 +2405,7 @@
           <a:p>
             <a:fld id="{BA5FE871-04E0-5340-A77A-88A0D6B20BA6}" type="datetimeFigureOut">
               <a:rPr lang="en-CZ" smtClean="0"/>
-              <a:t>12.06.2025</a:t>
+              <a:t>08/25/2025</a:t>
             </a:fld>
             <a:endParaRPr lang="en-CZ"/>
           </a:p>
@@ -2694,7 +2694,7 @@
           <a:p>
             <a:fld id="{BA5FE871-04E0-5340-A77A-88A0D6B20BA6}" type="datetimeFigureOut">
               <a:rPr lang="en-CZ" smtClean="0"/>
-              <a:t>12.06.2025</a:t>
+              <a:t>08/25/2025</a:t>
             </a:fld>
             <a:endParaRPr lang="en-CZ"/>
           </a:p>
@@ -2937,7 +2937,7 @@
           <a:p>
             <a:fld id="{BA5FE871-04E0-5340-A77A-88A0D6B20BA6}" type="datetimeFigureOut">
               <a:rPr lang="en-CZ" smtClean="0"/>
-              <a:t>12.06.2025</a:t>
+              <a:t>08/25/2025</a:t>
             </a:fld>
             <a:endParaRPr lang="en-CZ"/>
           </a:p>
@@ -6593,7 +6593,7 @@
         </p:nvGrpSpPr>
         <p:grpSpPr>
           <a:xfrm>
-            <a:off x="523792" y="1460827"/>
+            <a:off x="3007015" y="1825625"/>
             <a:ext cx="5168766" cy="4245907"/>
             <a:chOff x="838200" y="2036560"/>
             <a:chExt cx="5168766" cy="4245907"/>
@@ -6695,137 +6695,30 @@
           </p:txBody>
         </p:sp>
       </p:grpSp>
-      <p:grpSp>
-        <p:nvGrpSpPr>
-          <p:cNvPr id="5" name="Group 4">
-            <a:extLst>
-              <a:ext uri="{FF2B5EF4-FFF2-40B4-BE49-F238E27FC236}">
-                <a16:creationId xmlns:a16="http://schemas.microsoft.com/office/drawing/2014/main" id="{B40410C1-E020-D9E1-C48D-01C2ABF8C50A}"/>
-              </a:ext>
-            </a:extLst>
-          </p:cNvPr>
-          <p:cNvGrpSpPr/>
-          <p:nvPr/>
-        </p:nvGrpSpPr>
-        <p:grpSpPr>
-          <a:xfrm>
-            <a:off x="6006966" y="1649445"/>
-            <a:ext cx="5292809" cy="3499337"/>
-            <a:chOff x="6380910" y="2059623"/>
-            <a:chExt cx="5292809" cy="3499337"/>
-          </a:xfrm>
-        </p:grpSpPr>
-        <p:pic>
-          <p:nvPicPr>
-            <p:cNvPr id="6" name="Obrázek 5">
-              <a:extLst>
-                <a:ext uri="{FF2B5EF4-FFF2-40B4-BE49-F238E27FC236}">
-                  <a16:creationId xmlns:a16="http://schemas.microsoft.com/office/drawing/2014/main" id="{A779CA1A-A1F4-8132-F480-6C063DD89E79}"/>
-                </a:ext>
-              </a:extLst>
-            </p:cNvPr>
-            <p:cNvPicPr>
-              <a:picLocks noChangeAspect="1"/>
-            </p:cNvPicPr>
-            <p:nvPr/>
-          </p:nvPicPr>
-          <p:blipFill>
-            <a:blip r:embed="rId3"/>
-            <a:stretch>
-              <a:fillRect/>
-            </a:stretch>
-          </p:blipFill>
-          <p:spPr>
-            <a:xfrm>
-              <a:off x="6380910" y="2059623"/>
-              <a:ext cx="5292809" cy="2995068"/>
-            </a:xfrm>
-            <a:prstGeom prst="rect">
-              <a:avLst/>
-            </a:prstGeom>
-            <a:ln w="38100" cap="sq">
-              <a:solidFill>
-                <a:srgbClr val="000000"/>
-              </a:solidFill>
-              <a:prstDash val="solid"/>
-              <a:miter lim="800000"/>
-            </a:ln>
-            <a:effectLst>
-              <a:outerShdw blurRad="50800" dist="38100" dir="2700000" algn="tl" rotWithShape="0">
-                <a:srgbClr val="000000">
-                  <a:alpha val="43000"/>
-                </a:srgbClr>
-              </a:outerShdw>
-            </a:effectLst>
-          </p:spPr>
-        </p:pic>
-        <p:sp>
-          <p:nvSpPr>
-            <p:cNvPr id="7" name="TextovéPole 6">
-              <a:extLst>
-                <a:ext uri="{FF2B5EF4-FFF2-40B4-BE49-F238E27FC236}">
-                  <a16:creationId xmlns:a16="http://schemas.microsoft.com/office/drawing/2014/main" id="{C895C9B8-6B9F-7027-3789-6014A6F7EBBB}"/>
-                </a:ext>
-              </a:extLst>
-            </p:cNvPr>
-            <p:cNvSpPr txBox="1"/>
-            <p:nvPr/>
-          </p:nvSpPr>
-          <p:spPr>
-            <a:xfrm>
-              <a:off x="8110086" y="5189628"/>
-              <a:ext cx="3243714" cy="369332"/>
-            </a:xfrm>
-            <a:prstGeom prst="rect">
-              <a:avLst/>
-            </a:prstGeom>
-            <a:noFill/>
-          </p:spPr>
-          <p:txBody>
-            <a:bodyPr wrap="square" rtlCol="0">
-              <a:spAutoFit/>
-            </a:bodyPr>
-            <a:lstStyle/>
-            <a:p>
-              <a:r>
-                <a:rPr lang="cs-CZ" dirty="0"/>
-                <a:t>Nedokončený model </a:t>
-              </a:r>
-            </a:p>
-          </p:txBody>
-        </p:sp>
-      </p:grpSp>
       <p:pic>
         <p:nvPicPr>
-          <p:cNvPr id="2050" name="Picture 2">
-            <a:extLst>
-              <a:ext uri="{FF2B5EF4-FFF2-40B4-BE49-F238E27FC236}">
-                <a16:creationId xmlns:a16="http://schemas.microsoft.com/office/drawing/2014/main" id="{DBC5261D-2BD3-4E73-E07A-3437DD5F0F71}"/>
+          <p:cNvPr id="12" name="Obrázek 11">
+            <a:extLst>
+              <a:ext uri="{FF2B5EF4-FFF2-40B4-BE49-F238E27FC236}">
+                <a16:creationId xmlns:a16="http://schemas.microsoft.com/office/drawing/2014/main" id="{2428E9FB-6007-0A20-4359-DF4ADA53A9DF}"/>
               </a:ext>
             </a:extLst>
           </p:cNvPr>
           <p:cNvPicPr>
-            <a:picLocks noChangeAspect="1" noChangeArrowheads="1"/>
+            <a:picLocks noChangeAspect="1"/>
           </p:cNvPicPr>
           <p:nvPr/>
         </p:nvPicPr>
         <p:blipFill>
-          <a:blip r:embed="rId4">
-            <a:extLst>
-              <a:ext uri="{28A0092B-C50C-407E-A947-70E740481C1C}">
-                <a14:useLocalDpi xmlns:a14="http://schemas.microsoft.com/office/drawing/2010/main" val="0"/>
-              </a:ext>
-            </a:extLst>
-          </a:blip>
-          <a:srcRect/>
+          <a:blip r:embed="rId3"/>
           <a:stretch>
             <a:fillRect/>
           </a:stretch>
         </p:blipFill>
-        <p:spPr bwMode="auto">
+        <p:spPr>
           <a:xfrm>
-            <a:off x="338853" y="171667"/>
-            <a:ext cx="11514293" cy="6514666"/>
+            <a:off x="686451" y="418402"/>
+            <a:ext cx="10819097" cy="6074473"/>
           </a:xfrm>
           <a:prstGeom prst="rect">
             <a:avLst/>
@@ -6844,15 +6737,6 @@
               </a:srgbClr>
             </a:outerShdw>
           </a:effectLst>
-          <a:extLst>
-            <a:ext uri="{909E8E84-426E-40DD-AFC4-6F175D3DCCD1}">
-              <a14:hiddenFill xmlns:a14="http://schemas.microsoft.com/office/drawing/2010/main">
-                <a:solidFill>
-                  <a:srgbClr val="FFFFFF"/>
-                </a:solidFill>
-              </a14:hiddenFill>
-            </a:ext>
-          </a:extLst>
         </p:spPr>
       </p:pic>
     </p:spTree>
@@ -6886,7 +6770,7 @@
                             </p:stCondLst>
                             <p:childTnLst>
                               <p:par>
-                                <p:cTn id="5" presetID="35" presetClass="entr" presetSubtype="0" fill="hold" nodeType="clickEffect">
+                                <p:cTn id="5" presetID="2" presetClass="entr" presetSubtype="4" fill="hold" nodeType="clickEffect">
                                   <p:stCondLst>
                                     <p:cond delay="0"/>
                                   </p:stCondLst>
@@ -6899,7 +6783,7 @@
                                           </p:stCondLst>
                                         </p:cTn>
                                         <p:tgtEl>
-                                          <p:spTgt spid="2050"/>
+                                          <p:spTgt spid="12"/>
                                         </p:tgtEl>
                                         <p:attrNameLst>
                                           <p:attrName>style.visibility</p:attrName>
@@ -6909,79 +6793,48 @@
                                         <p:strVal val="visible"/>
                                       </p:to>
                                     </p:set>
-                                    <p:animEffect transition="in" filter="fade">
-                                      <p:cBhvr>
-                                        <p:cTn id="7" dur="2000"/>
+                                    <p:anim calcmode="lin" valueType="num">
+                                      <p:cBhvr additive="base">
+                                        <p:cTn id="7" dur="500" fill="hold"/>
                                         <p:tgtEl>
-                                          <p:spTgt spid="2050"/>
-                                        </p:tgtEl>
-                                      </p:cBhvr>
-                                    </p:animEffect>
-                                    <p:anim calcmode="lin" valueType="num">
-                                      <p:cBhvr>
-                                        <p:cTn id="8" dur="2000" fill="hold"/>
-                                        <p:tgtEl>
-                                          <p:spTgt spid="2050"/>
+                                          <p:spTgt spid="12"/>
                                         </p:tgtEl>
                                         <p:attrNameLst>
-                                          <p:attrName>style.rotation</p:attrName>
+                                          <p:attrName>ppt_x</p:attrName>
                                         </p:attrNameLst>
                                       </p:cBhvr>
                                       <p:tavLst>
                                         <p:tav tm="0">
                                           <p:val>
-                                            <p:fltVal val="720"/>
+                                            <p:strVal val="#ppt_x"/>
                                           </p:val>
                                         </p:tav>
                                         <p:tav tm="100000">
                                           <p:val>
-                                            <p:fltVal val="0"/>
+                                            <p:strVal val="#ppt_x"/>
                                           </p:val>
                                         </p:tav>
                                       </p:tavLst>
                                     </p:anim>
                                     <p:anim calcmode="lin" valueType="num">
-                                      <p:cBhvr>
-                                        <p:cTn id="9" dur="2000" fill="hold"/>
+                                      <p:cBhvr additive="base">
+                                        <p:cTn id="8" dur="500" fill="hold"/>
                                         <p:tgtEl>
-                                          <p:spTgt spid="2050"/>
+                                          <p:spTgt spid="12"/>
                                         </p:tgtEl>
                                         <p:attrNameLst>
-                                          <p:attrName>ppt_h</p:attrName>
+                                          <p:attrName>ppt_y</p:attrName>
                                         </p:attrNameLst>
                                       </p:cBhvr>
                                       <p:tavLst>
                                         <p:tav tm="0">
                                           <p:val>
-                                            <p:fltVal val="0"/>
+                                            <p:strVal val="1+#ppt_h/2"/>
                                           </p:val>
                                         </p:tav>
                                         <p:tav tm="100000">
                                           <p:val>
-                                            <p:strVal val="#ppt_h"/>
-                                          </p:val>
-                                        </p:tav>
-                                      </p:tavLst>
-                                    </p:anim>
-                                    <p:anim calcmode="lin" valueType="num">
-                                      <p:cBhvr>
-                                        <p:cTn id="10" dur="2000" fill="hold"/>
-                                        <p:tgtEl>
-                                          <p:spTgt spid="2050"/>
-                                        </p:tgtEl>
-                                        <p:attrNameLst>
-                                          <p:attrName>ppt_w</p:attrName>
-                                        </p:attrNameLst>
-                                      </p:cBhvr>
-                                      <p:tavLst>
-                                        <p:tav tm="0">
-                                          <p:val>
-                                            <p:fltVal val="0"/>
-                                          </p:val>
-                                        </p:tav>
-                                        <p:tav tm="100000">
-                                          <p:val>
-                                            <p:strVal val="#ppt_w"/>
+                                            <p:strVal val="#ppt_y"/>
                                           </p:val>
                                         </p:tav>
                                       </p:tavLst>
